--- a/docs/飛控系統方塊圖.pptx
+++ b/docs/飛控系統方塊圖.pptx
@@ -6,6 +6,7 @@
   </p:sldMasterIdLst>
   <p:sldIdLst>
     <p:sldId id="256" r:id="rId2"/>
+    <p:sldId id="258" r:id="rId3"/>
   </p:sldIdLst>
   <p:sldSz cx="12192000" cy="6858000"/>
   <p:notesSz cx="6858000" cy="9144000"/>
@@ -259,7 +260,7 @@
           <a:p>
             <a:fld id="{097470A6-93A4-4FC1-BC08-14BA89067419}" type="datetimeFigureOut">
               <a:rPr lang="zh-TW" altLang="en-US" smtClean="0"/>
-              <a:t>2026/10/14</a:t>
+              <a:t>2026/10/21</a:t>
             </a:fld>
             <a:endParaRPr lang="zh-TW" altLang="en-US"/>
           </a:p>
@@ -457,7 +458,7 @@
           <a:p>
             <a:fld id="{097470A6-93A4-4FC1-BC08-14BA89067419}" type="datetimeFigureOut">
               <a:rPr lang="zh-TW" altLang="en-US" smtClean="0"/>
-              <a:t>2026/10/14</a:t>
+              <a:t>2026/10/21</a:t>
             </a:fld>
             <a:endParaRPr lang="zh-TW" altLang="en-US"/>
           </a:p>
@@ -665,7 +666,7 @@
           <a:p>
             <a:fld id="{097470A6-93A4-4FC1-BC08-14BA89067419}" type="datetimeFigureOut">
               <a:rPr lang="zh-TW" altLang="en-US" smtClean="0"/>
-              <a:t>2026/10/14</a:t>
+              <a:t>2026/10/21</a:t>
             </a:fld>
             <a:endParaRPr lang="zh-TW" altLang="en-US"/>
           </a:p>
@@ -863,7 +864,7 @@
           <a:p>
             <a:fld id="{097470A6-93A4-4FC1-BC08-14BA89067419}" type="datetimeFigureOut">
               <a:rPr lang="zh-TW" altLang="en-US" smtClean="0"/>
-              <a:t>2026/10/14</a:t>
+              <a:t>2026/10/21</a:t>
             </a:fld>
             <a:endParaRPr lang="zh-TW" altLang="en-US"/>
           </a:p>
@@ -1138,7 +1139,7 @@
           <a:p>
             <a:fld id="{097470A6-93A4-4FC1-BC08-14BA89067419}" type="datetimeFigureOut">
               <a:rPr lang="zh-TW" altLang="en-US" smtClean="0"/>
-              <a:t>2026/10/14</a:t>
+              <a:t>2026/10/21</a:t>
             </a:fld>
             <a:endParaRPr lang="zh-TW" altLang="en-US"/>
           </a:p>
@@ -1403,7 +1404,7 @@
           <a:p>
             <a:fld id="{097470A6-93A4-4FC1-BC08-14BA89067419}" type="datetimeFigureOut">
               <a:rPr lang="zh-TW" altLang="en-US" smtClean="0"/>
-              <a:t>2026/10/14</a:t>
+              <a:t>2026/10/21</a:t>
             </a:fld>
             <a:endParaRPr lang="zh-TW" altLang="en-US"/>
           </a:p>
@@ -1815,7 +1816,7 @@
           <a:p>
             <a:fld id="{097470A6-93A4-4FC1-BC08-14BA89067419}" type="datetimeFigureOut">
               <a:rPr lang="zh-TW" altLang="en-US" smtClean="0"/>
-              <a:t>2026/10/14</a:t>
+              <a:t>2026/10/21</a:t>
             </a:fld>
             <a:endParaRPr lang="zh-TW" altLang="en-US"/>
           </a:p>
@@ -1956,7 +1957,7 @@
           <a:p>
             <a:fld id="{097470A6-93A4-4FC1-BC08-14BA89067419}" type="datetimeFigureOut">
               <a:rPr lang="zh-TW" altLang="en-US" smtClean="0"/>
-              <a:t>2026/10/14</a:t>
+              <a:t>2026/10/21</a:t>
             </a:fld>
             <a:endParaRPr lang="zh-TW" altLang="en-US"/>
           </a:p>
@@ -2069,7 +2070,7 @@
           <a:p>
             <a:fld id="{097470A6-93A4-4FC1-BC08-14BA89067419}" type="datetimeFigureOut">
               <a:rPr lang="zh-TW" altLang="en-US" smtClean="0"/>
-              <a:t>2026/10/14</a:t>
+              <a:t>2026/10/21</a:t>
             </a:fld>
             <a:endParaRPr lang="zh-TW" altLang="en-US"/>
           </a:p>
@@ -2380,7 +2381,7 @@
           <a:p>
             <a:fld id="{097470A6-93A4-4FC1-BC08-14BA89067419}" type="datetimeFigureOut">
               <a:rPr lang="zh-TW" altLang="en-US" smtClean="0"/>
-              <a:t>2026/10/14</a:t>
+              <a:t>2026/10/21</a:t>
             </a:fld>
             <a:endParaRPr lang="zh-TW" altLang="en-US"/>
           </a:p>
@@ -2668,7 +2669,7 @@
           <a:p>
             <a:fld id="{097470A6-93A4-4FC1-BC08-14BA89067419}" type="datetimeFigureOut">
               <a:rPr lang="zh-TW" altLang="en-US" smtClean="0"/>
-              <a:t>2026/10/14</a:t>
+              <a:t>2026/10/21</a:t>
             </a:fld>
             <a:endParaRPr lang="zh-TW" altLang="en-US"/>
           </a:p>
@@ -2909,7 +2910,7 @@
           <a:p>
             <a:fld id="{097470A6-93A4-4FC1-BC08-14BA89067419}" type="datetimeFigureOut">
               <a:rPr lang="zh-TW" altLang="en-US" smtClean="0"/>
-              <a:t>2026/10/14</a:t>
+              <a:t>2026/10/21</a:t>
             </a:fld>
             <a:endParaRPr lang="zh-TW" altLang="en-US"/>
           </a:p>
@@ -4314,10 +4315,598 @@
           </a:p>
         </p:txBody>
       </p:sp>
+      <p:sp>
+        <p:nvSpPr>
+          <p:cNvPr id="2" name="文字方塊 1">
+            <a:extLst>
+              <a:ext uri="{FF2B5EF4-FFF2-40B4-BE49-F238E27FC236}">
+                <a16:creationId xmlns:a16="http://schemas.microsoft.com/office/drawing/2014/main" id="{87E19447-3B4F-BE9E-AE26-BF68373FE93D}"/>
+              </a:ext>
+            </a:extLst>
+          </p:cNvPr>
+          <p:cNvSpPr txBox="1"/>
+          <p:nvPr/>
+        </p:nvSpPr>
+        <p:spPr>
+          <a:xfrm>
+            <a:off x="4361938" y="170329"/>
+            <a:ext cx="2954655" cy="646331"/>
+          </a:xfrm>
+          <a:prstGeom prst="rect">
+            <a:avLst/>
+          </a:prstGeom>
+          <a:noFill/>
+        </p:spPr>
+        <p:txBody>
+          <a:bodyPr wrap="none" rtlCol="0">
+            <a:spAutoFit/>
+          </a:bodyPr>
+          <a:lstStyle/>
+          <a:p>
+            <a:r>
+              <a:rPr lang="zh-TW" altLang="en-US" sz="3600" dirty="0"/>
+              <a:t>負重型無人機</a:t>
+            </a:r>
+          </a:p>
+        </p:txBody>
+      </p:sp>
     </p:spTree>
     <p:extLst>
       <p:ext uri="{BB962C8B-B14F-4D97-AF65-F5344CB8AC3E}">
         <p14:creationId xmlns:p14="http://schemas.microsoft.com/office/powerpoint/2010/main" val="2397381429"/>
+      </p:ext>
+    </p:extLst>
+  </p:cSld>
+  <p:clrMapOvr>
+    <a:masterClrMapping/>
+  </p:clrMapOvr>
+</p:sld>
+</file>
+
+<file path=ppt/slides/slide2.xml><?xml version="1.0" encoding="utf-8"?>
+<p:sld xmlns:a="http://schemas.openxmlformats.org/drawingml/2006/main" xmlns:r="http://schemas.openxmlformats.org/officeDocument/2006/relationships" xmlns:p="http://schemas.openxmlformats.org/presentationml/2006/main">
+  <p:cSld>
+    <p:spTree>
+      <p:nvGrpSpPr>
+        <p:cNvPr id="1" name="">
+          <a:extLst>
+            <a:ext uri="{FF2B5EF4-FFF2-40B4-BE49-F238E27FC236}">
+              <a16:creationId xmlns:a16="http://schemas.microsoft.com/office/drawing/2014/main" id="{ED9CDCD5-3F1F-D236-C5F7-DC7AEDBAA5F1}"/>
+            </a:ext>
+          </a:extLst>
+        </p:cNvPr>
+        <p:cNvGrpSpPr/>
+        <p:nvPr/>
+      </p:nvGrpSpPr>
+      <p:grpSpPr>
+        <a:xfrm>
+          <a:off x="0" y="0"/>
+          <a:ext cx="0" cy="0"/>
+          <a:chOff x="0" y="0"/>
+          <a:chExt cx="0" cy="0"/>
+        </a:xfrm>
+      </p:grpSpPr>
+      <p:sp>
+        <p:nvSpPr>
+          <p:cNvPr id="4" name="矩形 3">
+            <a:extLst>
+              <a:ext uri="{FF2B5EF4-FFF2-40B4-BE49-F238E27FC236}">
+                <a16:creationId xmlns:a16="http://schemas.microsoft.com/office/drawing/2014/main" id="{6469095F-5DF7-F029-0CD7-299DC47E10C8}"/>
+              </a:ext>
+            </a:extLst>
+          </p:cNvPr>
+          <p:cNvSpPr/>
+          <p:nvPr/>
+        </p:nvSpPr>
+        <p:spPr>
+          <a:xfrm>
+            <a:off x="2924730" y="1452056"/>
+            <a:ext cx="1452281" cy="788894"/>
+          </a:xfrm>
+          <a:prstGeom prst="rect">
+            <a:avLst/>
+          </a:prstGeom>
+        </p:spPr>
+        <p:style>
+          <a:lnRef idx="2">
+            <a:schemeClr val="dk1"/>
+          </a:lnRef>
+          <a:fillRef idx="1">
+            <a:schemeClr val="lt1"/>
+          </a:fillRef>
+          <a:effectRef idx="0">
+            <a:schemeClr val="dk1"/>
+          </a:effectRef>
+          <a:fontRef idx="minor">
+            <a:schemeClr val="dk1"/>
+          </a:fontRef>
+        </p:style>
+        <p:txBody>
+          <a:bodyPr rtlCol="0" anchor="ctr"/>
+          <a:lstStyle/>
+          <a:p>
+            <a:pPr algn="ctr"/>
+            <a:r>
+              <a:rPr lang="en-US" altLang="zh-TW" dirty="0"/>
+              <a:t>Kk</a:t>
+            </a:r>
+            <a:r>
+              <a:rPr lang="zh-TW" altLang="en-US" dirty="0"/>
+              <a:t>飛控板</a:t>
+            </a:r>
+          </a:p>
+        </p:txBody>
+      </p:sp>
+      <p:sp>
+        <p:nvSpPr>
+          <p:cNvPr id="5" name="矩形 4">
+            <a:extLst>
+              <a:ext uri="{FF2B5EF4-FFF2-40B4-BE49-F238E27FC236}">
+                <a16:creationId xmlns:a16="http://schemas.microsoft.com/office/drawing/2014/main" id="{A7E3D282-A95E-3483-B5F8-C47E7C988715}"/>
+              </a:ext>
+            </a:extLst>
+          </p:cNvPr>
+          <p:cNvSpPr/>
+          <p:nvPr/>
+        </p:nvSpPr>
+        <p:spPr>
+          <a:xfrm>
+            <a:off x="2924730" y="4063019"/>
+            <a:ext cx="1452282" cy="923365"/>
+          </a:xfrm>
+          <a:prstGeom prst="rect">
+            <a:avLst/>
+          </a:prstGeom>
+        </p:spPr>
+        <p:style>
+          <a:lnRef idx="2">
+            <a:schemeClr val="dk1"/>
+          </a:lnRef>
+          <a:fillRef idx="1">
+            <a:schemeClr val="lt1"/>
+          </a:fillRef>
+          <a:effectRef idx="0">
+            <a:schemeClr val="dk1"/>
+          </a:effectRef>
+          <a:fontRef idx="minor">
+            <a:schemeClr val="dk1"/>
+          </a:fontRef>
+        </p:style>
+        <p:txBody>
+          <a:bodyPr rtlCol="0" anchor="ctr"/>
+          <a:lstStyle/>
+          <a:p>
+            <a:pPr algn="ctr"/>
+            <a:r>
+              <a:rPr lang="en-US" altLang="zh-TW" dirty="0"/>
+              <a:t>WT32-ETH01</a:t>
+            </a:r>
+          </a:p>
+          <a:p>
+            <a:pPr algn="ctr"/>
+            <a:r>
+              <a:rPr lang="zh-TW" altLang="en-US" dirty="0"/>
+              <a:t>接收機</a:t>
+            </a:r>
+            <a:endParaRPr lang="en-US" altLang="zh-TW" dirty="0"/>
+          </a:p>
+        </p:txBody>
+      </p:sp>
+      <p:sp>
+        <p:nvSpPr>
+          <p:cNvPr id="10" name="矩形 9">
+            <a:extLst>
+              <a:ext uri="{FF2B5EF4-FFF2-40B4-BE49-F238E27FC236}">
+                <a16:creationId xmlns:a16="http://schemas.microsoft.com/office/drawing/2014/main" id="{24DD2CF6-657F-98E7-1B9A-A9B676D04C92}"/>
+              </a:ext>
+            </a:extLst>
+          </p:cNvPr>
+          <p:cNvSpPr/>
+          <p:nvPr/>
+        </p:nvSpPr>
+        <p:spPr>
+          <a:xfrm>
+            <a:off x="7292551" y="2505635"/>
+            <a:ext cx="1745313" cy="923365"/>
+          </a:xfrm>
+          <a:prstGeom prst="rect">
+            <a:avLst/>
+          </a:prstGeom>
+        </p:spPr>
+        <p:style>
+          <a:lnRef idx="2">
+            <a:schemeClr val="dk1"/>
+          </a:lnRef>
+          <a:fillRef idx="1">
+            <a:schemeClr val="lt1"/>
+          </a:fillRef>
+          <a:effectRef idx="0">
+            <a:schemeClr val="dk1"/>
+          </a:effectRef>
+          <a:fontRef idx="minor">
+            <a:schemeClr val="dk1"/>
+          </a:fontRef>
+        </p:style>
+        <p:txBody>
+          <a:bodyPr rtlCol="0" anchor="ctr"/>
+          <a:lstStyle/>
+          <a:p>
+            <a:pPr algn="ctr"/>
+            <a:r>
+              <a:rPr lang="en-US" altLang="zh-TW" dirty="0"/>
+              <a:t>ESP32 D1 mini</a:t>
+            </a:r>
+          </a:p>
+          <a:p>
+            <a:pPr algn="ctr"/>
+            <a:r>
+              <a:rPr lang="en-US" altLang="zh-TW" dirty="0"/>
+              <a:t>SSD 3306</a:t>
+            </a:r>
+          </a:p>
+          <a:p>
+            <a:pPr algn="ctr"/>
+            <a:r>
+              <a:rPr lang="zh-TW" altLang="en-US" dirty="0"/>
+              <a:t>遙控器</a:t>
+            </a:r>
+            <a:endParaRPr lang="en-US" altLang="zh-TW" dirty="0"/>
+          </a:p>
+        </p:txBody>
+      </p:sp>
+      <p:cxnSp>
+        <p:nvCxnSpPr>
+          <p:cNvPr id="14" name="直線單箭頭接點 13">
+            <a:extLst>
+              <a:ext uri="{FF2B5EF4-FFF2-40B4-BE49-F238E27FC236}">
+                <a16:creationId xmlns:a16="http://schemas.microsoft.com/office/drawing/2014/main" id="{75E48A7F-2B06-3AE6-2D7F-D5D5724EAC68}"/>
+              </a:ext>
+            </a:extLst>
+          </p:cNvPr>
+          <p:cNvCxnSpPr>
+            <a:cxnSpLocks/>
+          </p:cNvCxnSpPr>
+          <p:nvPr/>
+        </p:nvCxnSpPr>
+        <p:spPr>
+          <a:xfrm>
+            <a:off x="3650870" y="2409260"/>
+            <a:ext cx="0" cy="1454771"/>
+          </a:xfrm>
+          <a:prstGeom prst="straightConnector1">
+            <a:avLst/>
+          </a:prstGeom>
+          <a:ln>
+            <a:headEnd type="triangle" w="med" len="med"/>
+            <a:tailEnd type="triangle" w="med" len="med"/>
+          </a:ln>
+        </p:spPr>
+        <p:style>
+          <a:lnRef idx="1">
+            <a:schemeClr val="dk1"/>
+          </a:lnRef>
+          <a:fillRef idx="0">
+            <a:schemeClr val="dk1"/>
+          </a:fillRef>
+          <a:effectRef idx="0">
+            <a:schemeClr val="dk1"/>
+          </a:effectRef>
+          <a:fontRef idx="minor">
+            <a:schemeClr val="tx1"/>
+          </a:fontRef>
+        </p:style>
+      </p:cxnSp>
+      <p:sp>
+        <p:nvSpPr>
+          <p:cNvPr id="17" name="文字方塊 16">
+            <a:extLst>
+              <a:ext uri="{FF2B5EF4-FFF2-40B4-BE49-F238E27FC236}">
+                <a16:creationId xmlns:a16="http://schemas.microsoft.com/office/drawing/2014/main" id="{9C2AE2CD-18D9-961A-87BC-D054A01C7434}"/>
+              </a:ext>
+            </a:extLst>
+          </p:cNvPr>
+          <p:cNvSpPr txBox="1"/>
+          <p:nvPr/>
+        </p:nvSpPr>
+        <p:spPr>
+          <a:xfrm>
+            <a:off x="3751732" y="2782652"/>
+            <a:ext cx="763542" cy="369332"/>
+          </a:xfrm>
+          <a:prstGeom prst="rect">
+            <a:avLst/>
+          </a:prstGeom>
+          <a:noFill/>
+        </p:spPr>
+        <p:txBody>
+          <a:bodyPr wrap="none" rtlCol="0">
+            <a:spAutoFit/>
+          </a:bodyPr>
+          <a:lstStyle/>
+          <a:p>
+            <a:r>
+              <a:rPr lang="en-US" altLang="zh-TW" dirty="0"/>
+              <a:t>RS232</a:t>
+            </a:r>
+            <a:endParaRPr lang="zh-TW" altLang="en-US" dirty="0"/>
+          </a:p>
+        </p:txBody>
+      </p:sp>
+      <p:cxnSp>
+        <p:nvCxnSpPr>
+          <p:cNvPr id="27" name="直線單箭頭接點 26">
+            <a:extLst>
+              <a:ext uri="{FF2B5EF4-FFF2-40B4-BE49-F238E27FC236}">
+                <a16:creationId xmlns:a16="http://schemas.microsoft.com/office/drawing/2014/main" id="{EB9E366F-8EC6-158A-7776-F673BD222E40}"/>
+              </a:ext>
+            </a:extLst>
+          </p:cNvPr>
+          <p:cNvCxnSpPr>
+            <a:cxnSpLocks/>
+          </p:cNvCxnSpPr>
+          <p:nvPr/>
+        </p:nvCxnSpPr>
+        <p:spPr>
+          <a:xfrm flipH="1">
+            <a:off x="4588949" y="4718736"/>
+            <a:ext cx="2475239" cy="0"/>
+          </a:xfrm>
+          <a:prstGeom prst="straightConnector1">
+            <a:avLst/>
+          </a:prstGeom>
+          <a:ln>
+            <a:prstDash val="dash"/>
+            <a:headEnd type="triangle" w="med" len="med"/>
+            <a:tailEnd type="triangle" w="med" len="med"/>
+          </a:ln>
+        </p:spPr>
+        <p:style>
+          <a:lnRef idx="1">
+            <a:schemeClr val="dk1"/>
+          </a:lnRef>
+          <a:fillRef idx="0">
+            <a:schemeClr val="dk1"/>
+          </a:fillRef>
+          <a:effectRef idx="0">
+            <a:schemeClr val="dk1"/>
+          </a:effectRef>
+          <a:fontRef idx="minor">
+            <a:schemeClr val="tx1"/>
+          </a:fontRef>
+        </p:style>
+      </p:cxnSp>
+      <p:sp>
+        <p:nvSpPr>
+          <p:cNvPr id="32" name="文字方塊 31">
+            <a:extLst>
+              <a:ext uri="{FF2B5EF4-FFF2-40B4-BE49-F238E27FC236}">
+                <a16:creationId xmlns:a16="http://schemas.microsoft.com/office/drawing/2014/main" id="{F59FF3B7-E53C-1F9C-FD2F-2490E95EEE3E}"/>
+              </a:ext>
+            </a:extLst>
+          </p:cNvPr>
+          <p:cNvSpPr txBox="1"/>
+          <p:nvPr/>
+        </p:nvSpPr>
+        <p:spPr>
+          <a:xfrm>
+            <a:off x="5250540" y="4821094"/>
+            <a:ext cx="1091966" cy="369332"/>
+          </a:xfrm>
+          <a:prstGeom prst="rect">
+            <a:avLst/>
+          </a:prstGeom>
+          <a:noFill/>
+        </p:spPr>
+        <p:txBody>
+          <a:bodyPr wrap="none" rtlCol="0">
+            <a:spAutoFit/>
+          </a:bodyPr>
+          <a:lstStyle/>
+          <a:p>
+            <a:r>
+              <a:rPr lang="en-US" altLang="zh-TW" dirty="0"/>
+              <a:t>2.4G </a:t>
+            </a:r>
+            <a:r>
+              <a:rPr lang="en-US" altLang="zh-TW" dirty="0" err="1"/>
+              <a:t>WiFi</a:t>
+            </a:r>
+            <a:endParaRPr lang="zh-TW" altLang="en-US" dirty="0"/>
+          </a:p>
+        </p:txBody>
+      </p:sp>
+      <p:cxnSp>
+        <p:nvCxnSpPr>
+          <p:cNvPr id="46" name="直線單箭頭接點 45">
+            <a:extLst>
+              <a:ext uri="{FF2B5EF4-FFF2-40B4-BE49-F238E27FC236}">
+                <a16:creationId xmlns:a16="http://schemas.microsoft.com/office/drawing/2014/main" id="{5945ECB1-6009-6845-9B7C-FD050A6E81FD}"/>
+              </a:ext>
+            </a:extLst>
+          </p:cNvPr>
+          <p:cNvCxnSpPr>
+            <a:cxnSpLocks/>
+          </p:cNvCxnSpPr>
+          <p:nvPr/>
+        </p:nvCxnSpPr>
+        <p:spPr>
+          <a:xfrm flipV="1">
+            <a:off x="4652682" y="3054741"/>
+            <a:ext cx="2501607" cy="1192306"/>
+          </a:xfrm>
+          <a:prstGeom prst="straightConnector1">
+            <a:avLst/>
+          </a:prstGeom>
+          <a:ln>
+            <a:prstDash val="dash"/>
+            <a:headEnd type="triangle" w="med" len="med"/>
+            <a:tailEnd type="triangle" w="med" len="med"/>
+          </a:ln>
+        </p:spPr>
+        <p:style>
+          <a:lnRef idx="1">
+            <a:schemeClr val="dk1"/>
+          </a:lnRef>
+          <a:fillRef idx="0">
+            <a:schemeClr val="dk1"/>
+          </a:fillRef>
+          <a:effectRef idx="0">
+            <a:schemeClr val="dk1"/>
+          </a:effectRef>
+          <a:fontRef idx="minor">
+            <a:schemeClr val="tx1"/>
+          </a:fontRef>
+        </p:style>
+      </p:cxnSp>
+      <p:sp>
+        <p:nvSpPr>
+          <p:cNvPr id="48" name="文字方塊 47">
+            <a:extLst>
+              <a:ext uri="{FF2B5EF4-FFF2-40B4-BE49-F238E27FC236}">
+                <a16:creationId xmlns:a16="http://schemas.microsoft.com/office/drawing/2014/main" id="{8335489C-C606-99B1-6A8A-0F0CA25AE8E7}"/>
+              </a:ext>
+            </a:extLst>
+          </p:cNvPr>
+          <p:cNvSpPr txBox="1"/>
+          <p:nvPr/>
+        </p:nvSpPr>
+        <p:spPr>
+          <a:xfrm>
+            <a:off x="5051540" y="3136645"/>
+            <a:ext cx="931089" cy="369332"/>
+          </a:xfrm>
+          <a:prstGeom prst="rect">
+            <a:avLst/>
+          </a:prstGeom>
+          <a:noFill/>
+        </p:spPr>
+        <p:txBody>
+          <a:bodyPr wrap="none" rtlCol="0">
+            <a:spAutoFit/>
+          </a:bodyPr>
+          <a:lstStyle/>
+          <a:p>
+            <a:r>
+              <a:rPr lang="zh-TW" altLang="en-US" dirty="0"/>
+              <a:t>藍牙</a:t>
+            </a:r>
+            <a:r>
+              <a:rPr lang="en-US" altLang="zh-TW" dirty="0"/>
+              <a:t> BT</a:t>
+            </a:r>
+            <a:endParaRPr lang="zh-TW" altLang="en-US" dirty="0"/>
+          </a:p>
+        </p:txBody>
+      </p:sp>
+      <p:sp>
+        <p:nvSpPr>
+          <p:cNvPr id="2" name="矩形 1">
+            <a:extLst>
+              <a:ext uri="{FF2B5EF4-FFF2-40B4-BE49-F238E27FC236}">
+                <a16:creationId xmlns:a16="http://schemas.microsoft.com/office/drawing/2014/main" id="{B0F195D1-0B24-7D25-418A-8B2C34B28C27}"/>
+              </a:ext>
+            </a:extLst>
+          </p:cNvPr>
+          <p:cNvSpPr/>
+          <p:nvPr/>
+        </p:nvSpPr>
+        <p:spPr>
+          <a:xfrm>
+            <a:off x="7292552" y="4063019"/>
+            <a:ext cx="1745314" cy="923365"/>
+          </a:xfrm>
+          <a:prstGeom prst="rect">
+            <a:avLst/>
+          </a:prstGeom>
+        </p:spPr>
+        <p:style>
+          <a:lnRef idx="2">
+            <a:schemeClr val="dk1"/>
+          </a:lnRef>
+          <a:fillRef idx="1">
+            <a:schemeClr val="lt1"/>
+          </a:fillRef>
+          <a:effectRef idx="0">
+            <a:schemeClr val="dk1"/>
+          </a:effectRef>
+          <a:fontRef idx="minor">
+            <a:schemeClr val="dk1"/>
+          </a:fontRef>
+        </p:style>
+        <p:txBody>
+          <a:bodyPr rtlCol="0" anchor="ctr"/>
+          <a:lstStyle/>
+          <a:p>
+            <a:pPr algn="ctr"/>
+            <a:r>
+              <a:rPr lang="en-US" altLang="zh-TW" dirty="0"/>
+              <a:t>ESP32 D1 mini</a:t>
+            </a:r>
+          </a:p>
+          <a:p>
+            <a:pPr algn="ctr"/>
+            <a:r>
+              <a:rPr lang="en-US" altLang="zh-TW" dirty="0"/>
+              <a:t>Web Server</a:t>
+            </a:r>
+          </a:p>
+          <a:p>
+            <a:pPr algn="ctr"/>
+            <a:r>
+              <a:rPr lang="zh-TW" altLang="en-US" dirty="0"/>
+              <a:t>手機控制</a:t>
+            </a:r>
+            <a:endParaRPr lang="en-US" altLang="zh-TW" dirty="0"/>
+          </a:p>
+        </p:txBody>
+      </p:sp>
+      <p:sp>
+        <p:nvSpPr>
+          <p:cNvPr id="20" name="文字方塊 19">
+            <a:extLst>
+              <a:ext uri="{FF2B5EF4-FFF2-40B4-BE49-F238E27FC236}">
+                <a16:creationId xmlns:a16="http://schemas.microsoft.com/office/drawing/2014/main" id="{704691B1-E3EB-068F-C037-B6419B487559}"/>
+              </a:ext>
+            </a:extLst>
+          </p:cNvPr>
+          <p:cNvSpPr txBox="1"/>
+          <p:nvPr/>
+        </p:nvSpPr>
+        <p:spPr>
+          <a:xfrm>
+            <a:off x="4182655" y="179294"/>
+            <a:ext cx="3826689" cy="646331"/>
+          </a:xfrm>
+          <a:prstGeom prst="rect">
+            <a:avLst/>
+          </a:prstGeom>
+          <a:noFill/>
+        </p:spPr>
+        <p:txBody>
+          <a:bodyPr wrap="none" rtlCol="0">
+            <a:spAutoFit/>
+          </a:bodyPr>
+          <a:lstStyle/>
+          <a:p>
+            <a:r>
+              <a:rPr lang="zh-TW" altLang="en-US" sz="3600" dirty="0"/>
+              <a:t>小四軸 </a:t>
+            </a:r>
+            <a:r>
+              <a:rPr lang="en-US" altLang="zh-TW" sz="3600" dirty="0"/>
+              <a:t>Demo</a:t>
+            </a:r>
+            <a:r>
+              <a:rPr lang="zh-TW" altLang="en-US" sz="3600" dirty="0"/>
+              <a:t> 測試</a:t>
+            </a:r>
+          </a:p>
+        </p:txBody>
+      </p:sp>
+    </p:spTree>
+    <p:extLst>
+      <p:ext uri="{BB962C8B-B14F-4D97-AF65-F5344CB8AC3E}">
+        <p14:creationId xmlns:p14="http://schemas.microsoft.com/office/powerpoint/2010/main" val="3472687750"/>
       </p:ext>
     </p:extLst>
   </p:cSld>

--- a/docs/飛控系統方塊圖.pptx
+++ b/docs/飛控系統方塊圖.pptx
@@ -260,7 +260,7 @@
           <a:p>
             <a:fld id="{097470A6-93A4-4FC1-BC08-14BA89067419}" type="datetimeFigureOut">
               <a:rPr lang="zh-TW" altLang="en-US" smtClean="0"/>
-              <a:t>2026/10/21</a:t>
+              <a:t>2026/10/28</a:t>
             </a:fld>
             <a:endParaRPr lang="zh-TW" altLang="en-US"/>
           </a:p>
@@ -458,7 +458,7 @@
           <a:p>
             <a:fld id="{097470A6-93A4-4FC1-BC08-14BA89067419}" type="datetimeFigureOut">
               <a:rPr lang="zh-TW" altLang="en-US" smtClean="0"/>
-              <a:t>2026/10/21</a:t>
+              <a:t>2026/10/28</a:t>
             </a:fld>
             <a:endParaRPr lang="zh-TW" altLang="en-US"/>
           </a:p>
@@ -666,7 +666,7 @@
           <a:p>
             <a:fld id="{097470A6-93A4-4FC1-BC08-14BA89067419}" type="datetimeFigureOut">
               <a:rPr lang="zh-TW" altLang="en-US" smtClean="0"/>
-              <a:t>2026/10/21</a:t>
+              <a:t>2026/10/28</a:t>
             </a:fld>
             <a:endParaRPr lang="zh-TW" altLang="en-US"/>
           </a:p>
@@ -864,7 +864,7 @@
           <a:p>
             <a:fld id="{097470A6-93A4-4FC1-BC08-14BA89067419}" type="datetimeFigureOut">
               <a:rPr lang="zh-TW" altLang="en-US" smtClean="0"/>
-              <a:t>2026/10/21</a:t>
+              <a:t>2026/10/28</a:t>
             </a:fld>
             <a:endParaRPr lang="zh-TW" altLang="en-US"/>
           </a:p>
@@ -1139,7 +1139,7 @@
           <a:p>
             <a:fld id="{097470A6-93A4-4FC1-BC08-14BA89067419}" type="datetimeFigureOut">
               <a:rPr lang="zh-TW" altLang="en-US" smtClean="0"/>
-              <a:t>2026/10/21</a:t>
+              <a:t>2026/10/28</a:t>
             </a:fld>
             <a:endParaRPr lang="zh-TW" altLang="en-US"/>
           </a:p>
@@ -1404,7 +1404,7 @@
           <a:p>
             <a:fld id="{097470A6-93A4-4FC1-BC08-14BA89067419}" type="datetimeFigureOut">
               <a:rPr lang="zh-TW" altLang="en-US" smtClean="0"/>
-              <a:t>2026/10/21</a:t>
+              <a:t>2026/10/28</a:t>
             </a:fld>
             <a:endParaRPr lang="zh-TW" altLang="en-US"/>
           </a:p>
@@ -1816,7 +1816,7 @@
           <a:p>
             <a:fld id="{097470A6-93A4-4FC1-BC08-14BA89067419}" type="datetimeFigureOut">
               <a:rPr lang="zh-TW" altLang="en-US" smtClean="0"/>
-              <a:t>2026/10/21</a:t>
+              <a:t>2026/10/28</a:t>
             </a:fld>
             <a:endParaRPr lang="zh-TW" altLang="en-US"/>
           </a:p>
@@ -1957,7 +1957,7 @@
           <a:p>
             <a:fld id="{097470A6-93A4-4FC1-BC08-14BA89067419}" type="datetimeFigureOut">
               <a:rPr lang="zh-TW" altLang="en-US" smtClean="0"/>
-              <a:t>2026/10/21</a:t>
+              <a:t>2026/10/28</a:t>
             </a:fld>
             <a:endParaRPr lang="zh-TW" altLang="en-US"/>
           </a:p>
@@ -2070,7 +2070,7 @@
           <a:p>
             <a:fld id="{097470A6-93A4-4FC1-BC08-14BA89067419}" type="datetimeFigureOut">
               <a:rPr lang="zh-TW" altLang="en-US" smtClean="0"/>
-              <a:t>2026/10/21</a:t>
+              <a:t>2026/10/28</a:t>
             </a:fld>
             <a:endParaRPr lang="zh-TW" altLang="en-US"/>
           </a:p>
@@ -2381,7 +2381,7 @@
           <a:p>
             <a:fld id="{097470A6-93A4-4FC1-BC08-14BA89067419}" type="datetimeFigureOut">
               <a:rPr lang="zh-TW" altLang="en-US" smtClean="0"/>
-              <a:t>2026/10/21</a:t>
+              <a:t>2026/10/28</a:t>
             </a:fld>
             <a:endParaRPr lang="zh-TW" altLang="en-US"/>
           </a:p>
@@ -2669,7 +2669,7 @@
           <a:p>
             <a:fld id="{097470A6-93A4-4FC1-BC08-14BA89067419}" type="datetimeFigureOut">
               <a:rPr lang="zh-TW" altLang="en-US" smtClean="0"/>
-              <a:t>2026/10/21</a:t>
+              <a:t>2026/10/28</a:t>
             </a:fld>
             <a:endParaRPr lang="zh-TW" altLang="en-US"/>
           </a:p>
@@ -2910,7 +2910,7 @@
           <a:p>
             <a:fld id="{097470A6-93A4-4FC1-BC08-14BA89067419}" type="datetimeFigureOut">
               <a:rPr lang="zh-TW" altLang="en-US" smtClean="0"/>
-              <a:t>2026/10/21</a:t>
+              <a:t>2026/10/28</a:t>
             </a:fld>
             <a:endParaRPr lang="zh-TW" altLang="en-US"/>
           </a:p>
@@ -4400,7 +4400,7 @@
         </p:nvSpPr>
         <p:spPr>
           <a:xfrm>
-            <a:off x="2924730" y="1452056"/>
+            <a:off x="2288236" y="1443093"/>
             <a:ext cx="1452281" cy="788894"/>
           </a:xfrm>
           <a:prstGeom prst="rect">
@@ -4451,7 +4451,7 @@
         </p:nvSpPr>
         <p:spPr>
           <a:xfrm>
-            <a:off x="2924730" y="4063019"/>
+            <a:off x="2288236" y="4054056"/>
             <a:ext cx="1452282" cy="923365"/>
           </a:xfrm>
           <a:prstGeom prst="rect">
@@ -4506,7 +4506,7 @@
         </p:nvSpPr>
         <p:spPr>
           <a:xfrm>
-            <a:off x="7292551" y="2505635"/>
+            <a:off x="6656057" y="2496672"/>
             <a:ext cx="1745313" cy="923365"/>
           </a:xfrm>
           <a:prstGeom prst="rect">
@@ -4570,7 +4570,7 @@
         </p:nvCxnSpPr>
         <p:spPr>
           <a:xfrm>
-            <a:off x="3650870" y="2409260"/>
+            <a:off x="3014376" y="2400297"/>
             <a:ext cx="0" cy="1454771"/>
           </a:xfrm>
           <a:prstGeom prst="straightConnector1">
@@ -4610,7 +4610,7 @@
         </p:nvSpPr>
         <p:spPr>
           <a:xfrm>
-            <a:off x="3751732" y="2782652"/>
+            <a:off x="3115238" y="2773689"/>
             <a:ext cx="763542" cy="369332"/>
           </a:xfrm>
           <a:prstGeom prst="rect">
@@ -4648,7 +4648,7 @@
         </p:nvCxnSpPr>
         <p:spPr>
           <a:xfrm flipH="1">
-            <a:off x="4588949" y="4718736"/>
+            <a:off x="3952454" y="4727702"/>
             <a:ext cx="2475239" cy="0"/>
           </a:xfrm>
           <a:prstGeom prst="straightConnector1">
@@ -4689,7 +4689,7 @@
         </p:nvSpPr>
         <p:spPr>
           <a:xfrm>
-            <a:off x="5250540" y="4821094"/>
+            <a:off x="4652305" y="4358370"/>
             <a:ext cx="1091966" cy="369332"/>
           </a:xfrm>
           <a:prstGeom prst="rect">
@@ -4731,7 +4731,7 @@
         </p:nvCxnSpPr>
         <p:spPr>
           <a:xfrm flipV="1">
-            <a:off x="4652682" y="3054741"/>
+            <a:off x="4016188" y="3045778"/>
             <a:ext cx="2501607" cy="1192306"/>
           </a:xfrm>
           <a:prstGeom prst="straightConnector1">
@@ -4772,7 +4772,7 @@
         </p:nvSpPr>
         <p:spPr>
           <a:xfrm>
-            <a:off x="5051540" y="3136645"/>
+            <a:off x="4415046" y="3127682"/>
             <a:ext cx="931089" cy="369332"/>
           </a:xfrm>
           <a:prstGeom prst="rect">
@@ -4812,7 +4812,7 @@
         </p:nvSpPr>
         <p:spPr>
           <a:xfrm>
-            <a:off x="7292552" y="4063019"/>
+            <a:off x="6656058" y="4054056"/>
             <a:ext cx="1745314" cy="923365"/>
           </a:xfrm>
           <a:prstGeom prst="rect">
@@ -4850,14 +4850,6 @@
               <a:t>Web Server</a:t>
             </a:r>
           </a:p>
-          <a:p>
-            <a:pPr algn="ctr"/>
-            <a:r>
-              <a:rPr lang="zh-TW" altLang="en-US" dirty="0"/>
-              <a:t>手機控制</a:t>
-            </a:r>
-            <a:endParaRPr lang="en-US" altLang="zh-TW" dirty="0"/>
-          </a:p>
         </p:txBody>
       </p:sp>
       <p:sp>
@@ -4900,6 +4892,273 @@
               <a:rPr lang="zh-TW" altLang="en-US" sz="3600" dirty="0"/>
               <a:t> 測試</a:t>
             </a:r>
+          </a:p>
+        </p:txBody>
+      </p:sp>
+      <p:sp>
+        <p:nvSpPr>
+          <p:cNvPr id="3" name="矩形 2">
+            <a:extLst>
+              <a:ext uri="{FF2B5EF4-FFF2-40B4-BE49-F238E27FC236}">
+                <a16:creationId xmlns:a16="http://schemas.microsoft.com/office/drawing/2014/main" id="{7B1D064D-C585-5713-AFC4-82069FDBBC3C}"/>
+              </a:ext>
+            </a:extLst>
+          </p:cNvPr>
+          <p:cNvSpPr/>
+          <p:nvPr/>
+        </p:nvSpPr>
+        <p:spPr>
+          <a:xfrm>
+            <a:off x="10179189" y="4143793"/>
+            <a:ext cx="1250813" cy="724134"/>
+          </a:xfrm>
+          <a:prstGeom prst="rect">
+            <a:avLst/>
+          </a:prstGeom>
+        </p:spPr>
+        <p:style>
+          <a:lnRef idx="2">
+            <a:schemeClr val="dk1"/>
+          </a:lnRef>
+          <a:fillRef idx="1">
+            <a:schemeClr val="lt1"/>
+          </a:fillRef>
+          <a:effectRef idx="0">
+            <a:schemeClr val="dk1"/>
+          </a:effectRef>
+          <a:fontRef idx="minor">
+            <a:schemeClr val="dk1"/>
+          </a:fontRef>
+        </p:style>
+        <p:txBody>
+          <a:bodyPr rtlCol="0" anchor="ctr"/>
+          <a:lstStyle/>
+          <a:p>
+            <a:pPr algn="ctr"/>
+            <a:r>
+              <a:rPr lang="zh-TW" altLang="en-US" dirty="0"/>
+              <a:t>手機控制</a:t>
+            </a:r>
+            <a:endParaRPr lang="en-US" altLang="zh-TW" dirty="0"/>
+          </a:p>
+        </p:txBody>
+      </p:sp>
+      <p:cxnSp>
+        <p:nvCxnSpPr>
+          <p:cNvPr id="6" name="直線單箭頭接點 5">
+            <a:extLst>
+              <a:ext uri="{FF2B5EF4-FFF2-40B4-BE49-F238E27FC236}">
+                <a16:creationId xmlns:a16="http://schemas.microsoft.com/office/drawing/2014/main" id="{68B90607-93C2-4843-6F10-5161E686AFFC}"/>
+              </a:ext>
+            </a:extLst>
+          </p:cNvPr>
+          <p:cNvCxnSpPr>
+            <a:cxnSpLocks/>
+          </p:cNvCxnSpPr>
+          <p:nvPr/>
+        </p:nvCxnSpPr>
+        <p:spPr>
+          <a:xfrm flipH="1">
+            <a:off x="8683033" y="4515738"/>
+            <a:ext cx="1196073" cy="0"/>
+          </a:xfrm>
+          <a:prstGeom prst="straightConnector1">
+            <a:avLst/>
+          </a:prstGeom>
+          <a:ln>
+            <a:prstDash val="dash"/>
+            <a:headEnd type="triangle" w="med" len="med"/>
+            <a:tailEnd type="triangle" w="med" len="med"/>
+          </a:ln>
+        </p:spPr>
+        <p:style>
+          <a:lnRef idx="1">
+            <a:schemeClr val="dk1"/>
+          </a:lnRef>
+          <a:fillRef idx="0">
+            <a:schemeClr val="dk1"/>
+          </a:fillRef>
+          <a:effectRef idx="0">
+            <a:schemeClr val="dk1"/>
+          </a:effectRef>
+          <a:fontRef idx="minor">
+            <a:schemeClr val="tx1"/>
+          </a:fontRef>
+        </p:style>
+      </p:cxnSp>
+      <p:sp>
+        <p:nvSpPr>
+          <p:cNvPr id="8" name="文字方塊 7">
+            <a:extLst>
+              <a:ext uri="{FF2B5EF4-FFF2-40B4-BE49-F238E27FC236}">
+                <a16:creationId xmlns:a16="http://schemas.microsoft.com/office/drawing/2014/main" id="{C96E2941-7BA9-79E9-76B0-ED64B64BD35C}"/>
+              </a:ext>
+            </a:extLst>
+          </p:cNvPr>
+          <p:cNvSpPr txBox="1"/>
+          <p:nvPr/>
+        </p:nvSpPr>
+        <p:spPr>
+          <a:xfrm>
+            <a:off x="3287508" y="4977421"/>
+            <a:ext cx="906017" cy="369332"/>
+          </a:xfrm>
+          <a:prstGeom prst="rect">
+            <a:avLst/>
+          </a:prstGeom>
+          <a:noFill/>
+        </p:spPr>
+        <p:txBody>
+          <a:bodyPr wrap="none" rtlCol="0">
+            <a:spAutoFit/>
+          </a:bodyPr>
+          <a:lstStyle/>
+          <a:p>
+            <a:r>
+              <a:rPr lang="en-US" altLang="zh-TW" dirty="0" err="1"/>
+              <a:t>WiFi</a:t>
+            </a:r>
+            <a:r>
+              <a:rPr lang="zh-TW" altLang="en-US" dirty="0"/>
+              <a:t> </a:t>
+            </a:r>
+            <a:r>
+              <a:rPr lang="en-US" altLang="zh-TW" dirty="0"/>
+              <a:t>AP</a:t>
+            </a:r>
+            <a:endParaRPr lang="zh-TW" altLang="en-US" dirty="0"/>
+          </a:p>
+        </p:txBody>
+      </p:sp>
+      <p:sp>
+        <p:nvSpPr>
+          <p:cNvPr id="9" name="文字方塊 8">
+            <a:extLst>
+              <a:ext uri="{FF2B5EF4-FFF2-40B4-BE49-F238E27FC236}">
+                <a16:creationId xmlns:a16="http://schemas.microsoft.com/office/drawing/2014/main" id="{1DB513D9-CFBB-CE23-85E5-83E54CB1C2F9}"/>
+              </a:ext>
+            </a:extLst>
+          </p:cNvPr>
+          <p:cNvSpPr txBox="1"/>
+          <p:nvPr/>
+        </p:nvSpPr>
+        <p:spPr>
+          <a:xfrm>
+            <a:off x="6058233" y="4977421"/>
+            <a:ext cx="1195648" cy="369332"/>
+          </a:xfrm>
+          <a:prstGeom prst="rect">
+            <a:avLst/>
+          </a:prstGeom>
+          <a:noFill/>
+        </p:spPr>
+        <p:txBody>
+          <a:bodyPr wrap="none" rtlCol="0">
+            <a:spAutoFit/>
+          </a:bodyPr>
+          <a:lstStyle/>
+          <a:p>
+            <a:r>
+              <a:rPr lang="en-US" altLang="zh-TW" dirty="0" err="1"/>
+              <a:t>WiFi</a:t>
+            </a:r>
+            <a:r>
+              <a:rPr lang="zh-TW" altLang="en-US" dirty="0"/>
+              <a:t> </a:t>
+            </a:r>
+            <a:r>
+              <a:rPr lang="en-US" altLang="zh-TW" dirty="0"/>
+              <a:t>Client</a:t>
+            </a:r>
+            <a:endParaRPr lang="zh-TW" altLang="en-US" dirty="0"/>
+          </a:p>
+        </p:txBody>
+      </p:sp>
+      <p:sp>
+        <p:nvSpPr>
+          <p:cNvPr id="11" name="文字方塊 10">
+            <a:extLst>
+              <a:ext uri="{FF2B5EF4-FFF2-40B4-BE49-F238E27FC236}">
+                <a16:creationId xmlns:a16="http://schemas.microsoft.com/office/drawing/2014/main" id="{2F2B7BB9-4158-47E8-80A1-336B4E91BFD5}"/>
+              </a:ext>
+            </a:extLst>
+          </p:cNvPr>
+          <p:cNvSpPr txBox="1"/>
+          <p:nvPr/>
+        </p:nvSpPr>
+        <p:spPr>
+          <a:xfrm>
+            <a:off x="7948361" y="4977421"/>
+            <a:ext cx="906017" cy="369332"/>
+          </a:xfrm>
+          <a:prstGeom prst="rect">
+            <a:avLst/>
+          </a:prstGeom>
+          <a:noFill/>
+        </p:spPr>
+        <p:txBody>
+          <a:bodyPr wrap="none" rtlCol="0">
+            <a:spAutoFit/>
+          </a:bodyPr>
+          <a:lstStyle/>
+          <a:p>
+            <a:r>
+              <a:rPr lang="en-US" altLang="zh-TW" dirty="0" err="1"/>
+              <a:t>WiFi</a:t>
+            </a:r>
+            <a:r>
+              <a:rPr lang="zh-TW" altLang="en-US" dirty="0"/>
+              <a:t> </a:t>
+            </a:r>
+            <a:r>
+              <a:rPr lang="en-US" altLang="zh-TW" dirty="0"/>
+              <a:t>AP</a:t>
+            </a:r>
+            <a:endParaRPr lang="zh-TW" altLang="en-US" dirty="0"/>
+          </a:p>
+        </p:txBody>
+      </p:sp>
+      <p:sp>
+        <p:nvSpPr>
+          <p:cNvPr id="12" name="文字方塊 11">
+            <a:extLst>
+              <a:ext uri="{FF2B5EF4-FFF2-40B4-BE49-F238E27FC236}">
+                <a16:creationId xmlns:a16="http://schemas.microsoft.com/office/drawing/2014/main" id="{1FAD49AE-CF2D-E064-A941-DE804D1C2D80}"/>
+              </a:ext>
+            </a:extLst>
+          </p:cNvPr>
+          <p:cNvSpPr txBox="1"/>
+          <p:nvPr/>
+        </p:nvSpPr>
+        <p:spPr>
+          <a:xfrm>
+            <a:off x="9581365" y="4977421"/>
+            <a:ext cx="1195648" cy="369332"/>
+          </a:xfrm>
+          <a:prstGeom prst="rect">
+            <a:avLst/>
+          </a:prstGeom>
+          <a:noFill/>
+        </p:spPr>
+        <p:txBody>
+          <a:bodyPr wrap="none" rtlCol="0">
+            <a:spAutoFit/>
+          </a:bodyPr>
+          <a:lstStyle/>
+          <a:p>
+            <a:r>
+              <a:rPr lang="en-US" altLang="zh-TW" dirty="0" err="1"/>
+              <a:t>WiFi</a:t>
+            </a:r>
+            <a:r>
+              <a:rPr lang="zh-TW" altLang="en-US" dirty="0"/>
+              <a:t> </a:t>
+            </a:r>
+            <a:r>
+              <a:rPr lang="en-US" altLang="zh-TW" dirty="0"/>
+              <a:t>Client</a:t>
+            </a:r>
+            <a:endParaRPr lang="zh-TW" altLang="en-US" dirty="0"/>
           </a:p>
         </p:txBody>
       </p:sp>
